--- a/ziliao/中式甜點教學簡報.pptx
+++ b/ziliao/中式甜點教學簡報.pptx
@@ -17945,7 +17945,7 @@
                 <a:ea typeface="Hiragino Sans GB"/>
                 <a:cs typeface="Hiragino Sans GB"/>
               </a:rPr>
-              <a:t>茯苓粉</a:t>
+              <a:t>蝶豆花粉</a:t>
             </a:r>
           </a:p>
         </p:txBody>
@@ -17959,362 +17959,6 @@
         <p:spPr>
           <a:xfrm>
             <a:off x="9006840" y="3054096"/>
-            <a:ext cx="1097280" cy="347472"/>
-          </a:xfrm>
-          <a:prstGeom prst="rect">
-            <a:avLst/>
-          </a:prstGeom>
-          <a:noFill/>
-        </p:spPr>
-        <p:txBody>
-          <a:bodyPr wrap="square"/>
-          <a:lstStyle/>
-          <a:p>
-            <a:pPr algn="l">
-              <a:lnSpc>
-                <a:spcPct val="115000"/>
-              </a:lnSpc>
-              <a:spcBef>
-                <a:spcPts val="0"/>
-              </a:spcBef>
-              <a:spcAft>
-                <a:spcPts val="0"/>
-              </a:spcAft>
-            </a:pPr>
-            <a:r>
-              <a:rPr sz="1500" b="1" i="0">
-                <a:solidFill>
-                  <a:srgbClr val="5B8DFF"/>
-                </a:solidFill>
-                <a:latin typeface="Hiragino Sans GB"/>
-                <a:ea typeface="Hiragino Sans GB"/>
-                <a:cs typeface="Hiragino Sans GB"/>
-              </a:rPr>
-              <a:t>10 g</a:t>
-            </a:r>
-          </a:p>
-        </p:txBody>
-      </p:sp>
-      <p:sp>
-        <p:nvSpPr>
-          <p:cNvPr id="36" name="TextBox 35"/>
-          <p:cNvSpPr txBox="1"/>
-          <p:nvPr/>
-        </p:nvSpPr>
-        <p:spPr>
-          <a:xfrm>
-            <a:off x="10104120" y="3054096"/>
-            <a:ext cx="1463040" cy="347472"/>
-          </a:xfrm>
-          <a:prstGeom prst="rect">
-            <a:avLst/>
-          </a:prstGeom>
-          <a:noFill/>
-        </p:spPr>
-        <p:txBody>
-          <a:bodyPr wrap="square"/>
-          <a:lstStyle/>
-          <a:p>
-            <a:pPr algn="l">
-              <a:lnSpc>
-                <a:spcPct val="115000"/>
-              </a:lnSpc>
-              <a:spcBef>
-                <a:spcPts val="0"/>
-              </a:spcBef>
-              <a:spcAft>
-                <a:spcPts val="0"/>
-              </a:spcAft>
-            </a:pPr>
-            <a:r>
-              <a:rPr sz="1200" b="0" i="0">
-                <a:solidFill>
-                  <a:srgbClr val="7A6478"/>
-                </a:solidFill>
-                <a:latin typeface="Hiragino Sans GB"/>
-                <a:ea typeface="Hiragino Sans GB"/>
-                <a:cs typeface="Hiragino Sans GB"/>
-              </a:rPr>
-              <a:t>參考「三白飲」</a:t>
-            </a:r>
-          </a:p>
-        </p:txBody>
-      </p:sp>
-      <p:sp>
-        <p:nvSpPr>
-          <p:cNvPr id="37" name="Oval 36"/>
-          <p:cNvSpPr/>
-          <p:nvPr/>
-        </p:nvSpPr>
-        <p:spPr>
-          <a:xfrm>
-            <a:off x="6510528" y="3566160"/>
-            <a:ext cx="201168" cy="201168"/>
-          </a:xfrm>
-          <a:prstGeom prst="ellipse">
-            <a:avLst/>
-          </a:prstGeom>
-          <a:solidFill>
-            <a:srgbClr val="5B8DFF"/>
-          </a:solidFill>
-          <a:ln>
-            <a:noFill/>
-          </a:ln>
-        </p:spPr>
-        <p:style>
-          <a:lnRef idx="1">
-            <a:schemeClr val="accent1"/>
-          </a:lnRef>
-          <a:fillRef idx="3">
-            <a:schemeClr val="accent1"/>
-          </a:fillRef>
-          <a:effectRef idx="2">
-            <a:schemeClr val="accent1"/>
-          </a:effectRef>
-          <a:fontRef idx="minor">
-            <a:schemeClr val="lt1"/>
-          </a:fontRef>
-        </p:style>
-        <p:txBody>
-          <a:bodyPr rtlCol="0" anchor="ctr"/>
-          <a:lstStyle/>
-          <a:p>
-            <a:pPr algn="ctr"/>
-          </a:p>
-        </p:txBody>
-      </p:sp>
-      <p:sp>
-        <p:nvSpPr>
-          <p:cNvPr id="38" name="TextBox 37"/>
-          <p:cNvSpPr txBox="1"/>
-          <p:nvPr/>
-        </p:nvSpPr>
-        <p:spPr>
-          <a:xfrm>
-            <a:off x="6812280" y="3493008"/>
-            <a:ext cx="2194560" cy="347472"/>
-          </a:xfrm>
-          <a:prstGeom prst="rect">
-            <a:avLst/>
-          </a:prstGeom>
-          <a:noFill/>
-        </p:spPr>
-        <p:txBody>
-          <a:bodyPr wrap="square"/>
-          <a:lstStyle/>
-          <a:p>
-            <a:pPr algn="l">
-              <a:lnSpc>
-                <a:spcPct val="115000"/>
-              </a:lnSpc>
-              <a:spcBef>
-                <a:spcPts val="0"/>
-              </a:spcBef>
-              <a:spcAft>
-                <a:spcPts val="0"/>
-              </a:spcAft>
-            </a:pPr>
-            <a:r>
-              <a:rPr sz="1500" b="1" i="0">
-                <a:solidFill>
-                  <a:srgbClr val="3A2A42"/>
-                </a:solidFill>
-                <a:latin typeface="Hiragino Sans GB"/>
-                <a:ea typeface="Hiragino Sans GB"/>
-                <a:cs typeface="Hiragino Sans GB"/>
-              </a:rPr>
-              <a:t>百合粉</a:t>
-            </a:r>
-          </a:p>
-        </p:txBody>
-      </p:sp>
-      <p:sp>
-        <p:nvSpPr>
-          <p:cNvPr id="39" name="TextBox 38"/>
-          <p:cNvSpPr txBox="1"/>
-          <p:nvPr/>
-        </p:nvSpPr>
-        <p:spPr>
-          <a:xfrm>
-            <a:off x="9006840" y="3493008"/>
-            <a:ext cx="1097280" cy="347472"/>
-          </a:xfrm>
-          <a:prstGeom prst="rect">
-            <a:avLst/>
-          </a:prstGeom>
-          <a:noFill/>
-        </p:spPr>
-        <p:txBody>
-          <a:bodyPr wrap="square"/>
-          <a:lstStyle/>
-          <a:p>
-            <a:pPr algn="l">
-              <a:lnSpc>
-                <a:spcPct val="115000"/>
-              </a:lnSpc>
-              <a:spcBef>
-                <a:spcPts val="0"/>
-              </a:spcBef>
-              <a:spcAft>
-                <a:spcPts val="0"/>
-              </a:spcAft>
-            </a:pPr>
-            <a:r>
-              <a:rPr sz="1500" b="1" i="0">
-                <a:solidFill>
-                  <a:srgbClr val="5B8DFF"/>
-                </a:solidFill>
-                <a:latin typeface="Hiragino Sans GB"/>
-                <a:ea typeface="Hiragino Sans GB"/>
-                <a:cs typeface="Hiragino Sans GB"/>
-              </a:rPr>
-              <a:t>10 g</a:t>
-            </a:r>
-          </a:p>
-        </p:txBody>
-      </p:sp>
-      <p:sp>
-        <p:nvSpPr>
-          <p:cNvPr id="40" name="TextBox 39"/>
-          <p:cNvSpPr txBox="1"/>
-          <p:nvPr/>
-        </p:nvSpPr>
-        <p:spPr>
-          <a:xfrm>
-            <a:off x="10104120" y="3493008"/>
-            <a:ext cx="1463040" cy="347472"/>
-          </a:xfrm>
-          <a:prstGeom prst="rect">
-            <a:avLst/>
-          </a:prstGeom>
-          <a:noFill/>
-        </p:spPr>
-        <p:txBody>
-          <a:bodyPr wrap="square"/>
-          <a:lstStyle/>
-          <a:p>
-            <a:pPr algn="l">
-              <a:lnSpc>
-                <a:spcPct val="115000"/>
-              </a:lnSpc>
-              <a:spcBef>
-                <a:spcPts val="0"/>
-              </a:spcBef>
-              <a:spcAft>
-                <a:spcPts val="0"/>
-              </a:spcAft>
-            </a:pPr>
-            <a:r>
-              <a:rPr sz="1200" b="0" i="0">
-                <a:solidFill>
-                  <a:srgbClr val="7A6478"/>
-                </a:solidFill>
-                <a:latin typeface="Hiragino Sans GB"/>
-                <a:ea typeface="Hiragino Sans GB"/>
-                <a:cs typeface="Hiragino Sans GB"/>
-              </a:rPr>
-              <a:t>一起揉進山藥泥</a:t>
-            </a:r>
-          </a:p>
-        </p:txBody>
-      </p:sp>
-      <p:sp>
-        <p:nvSpPr>
-          <p:cNvPr id="41" name="Oval 40"/>
-          <p:cNvSpPr/>
-          <p:nvPr/>
-        </p:nvSpPr>
-        <p:spPr>
-          <a:xfrm>
-            <a:off x="6510528" y="4005072"/>
-            <a:ext cx="201168" cy="201168"/>
-          </a:xfrm>
-          <a:prstGeom prst="ellipse">
-            <a:avLst/>
-          </a:prstGeom>
-          <a:solidFill>
-            <a:srgbClr val="5B8DFF"/>
-          </a:solidFill>
-          <a:ln>
-            <a:noFill/>
-          </a:ln>
-        </p:spPr>
-        <p:style>
-          <a:lnRef idx="1">
-            <a:schemeClr val="accent1"/>
-          </a:lnRef>
-          <a:fillRef idx="3">
-            <a:schemeClr val="accent1"/>
-          </a:fillRef>
-          <a:effectRef idx="2">
-            <a:schemeClr val="accent1"/>
-          </a:effectRef>
-          <a:fontRef idx="minor">
-            <a:schemeClr val="lt1"/>
-          </a:fontRef>
-        </p:style>
-        <p:txBody>
-          <a:bodyPr rtlCol="0" anchor="ctr"/>
-          <a:lstStyle/>
-          <a:p>
-            <a:pPr algn="ctr"/>
-          </a:p>
-        </p:txBody>
-      </p:sp>
-      <p:sp>
-        <p:nvSpPr>
-          <p:cNvPr id="42" name="TextBox 41"/>
-          <p:cNvSpPr txBox="1"/>
-          <p:nvPr/>
-        </p:nvSpPr>
-        <p:spPr>
-          <a:xfrm>
-            <a:off x="6812280" y="3931920"/>
-            <a:ext cx="2194560" cy="347472"/>
-          </a:xfrm>
-          <a:prstGeom prst="rect">
-            <a:avLst/>
-          </a:prstGeom>
-          <a:noFill/>
-        </p:spPr>
-        <p:txBody>
-          <a:bodyPr wrap="square"/>
-          <a:lstStyle/>
-          <a:p>
-            <a:pPr algn="l">
-              <a:lnSpc>
-                <a:spcPct val="115000"/>
-              </a:lnSpc>
-              <a:spcBef>
-                <a:spcPts val="0"/>
-              </a:spcBef>
-              <a:spcAft>
-                <a:spcPts val="0"/>
-              </a:spcAft>
-            </a:pPr>
-            <a:r>
-              <a:rPr sz="1500" b="1" i="0">
-                <a:solidFill>
-                  <a:srgbClr val="3A2A42"/>
-                </a:solidFill>
-                <a:latin typeface="Hiragino Sans GB"/>
-                <a:ea typeface="Hiragino Sans GB"/>
-                <a:cs typeface="Hiragino Sans GB"/>
-              </a:rPr>
-              <a:t>蝶豆花粉</a:t>
-            </a:r>
-          </a:p>
-        </p:txBody>
-      </p:sp>
-      <p:sp>
-        <p:nvSpPr>
-          <p:cNvPr id="43" name="TextBox 42"/>
-          <p:cNvSpPr txBox="1"/>
-          <p:nvPr/>
-        </p:nvSpPr>
-        <p:spPr>
-          <a:xfrm>
-            <a:off x="9006840" y="3931920"/>
             <a:ext cx="1097280" cy="347472"/>
           </a:xfrm>
           <a:prstGeom prst="rect">
@@ -18353,13 +17997,13 @@
       </p:sp>
       <p:sp>
         <p:nvSpPr>
-          <p:cNvPr id="44" name="TextBox 43"/>
+          <p:cNvPr id="36" name="TextBox 35"/>
           <p:cNvSpPr txBox="1"/>
           <p:nvPr/>
         </p:nvSpPr>
         <p:spPr>
           <a:xfrm>
-            <a:off x="10104120" y="3931920"/>
+            <a:off x="10104120" y="3054096"/>
             <a:ext cx="1463040" cy="347472"/>
           </a:xfrm>
           <a:prstGeom prst="rect">
@@ -18398,13 +18042,13 @@
       </p:sp>
       <p:sp>
         <p:nvSpPr>
-          <p:cNvPr id="45" name="TextBox 44"/>
+          <p:cNvPr id="37" name="TextBox 36"/>
           <p:cNvSpPr txBox="1"/>
           <p:nvPr/>
         </p:nvSpPr>
         <p:spPr>
           <a:xfrm>
-            <a:off x="6446520" y="4572000"/>
+            <a:off x="6446520" y="3840480"/>
             <a:ext cx="5120640" cy="1371600"/>
           </a:xfrm>
           <a:prstGeom prst="rect">
@@ -18444,7 +18088,7 @@
       </p:sp>
       <p:sp>
         <p:nvSpPr>
-          <p:cNvPr id="46" name="TextBox 45"/>
+          <p:cNvPr id="38" name="TextBox 37"/>
           <p:cNvSpPr txBox="1"/>
           <p:nvPr/>
         </p:nvSpPr>
@@ -18489,7 +18133,7 @@
       </p:sp>
       <p:sp>
         <p:nvSpPr>
-          <p:cNvPr id="47" name="Rounded Rectangle 46"/>
+          <p:cNvPr id="39" name="Rounded Rectangle 38"/>
           <p:cNvSpPr/>
           <p:nvPr/>
         </p:nvSpPr>
@@ -18534,7 +18178,7 @@
       </p:sp>
       <p:sp>
         <p:nvSpPr>
-          <p:cNvPr id="48" name="TextBox 47"/>
+          <p:cNvPr id="40" name="TextBox 39"/>
           <p:cNvSpPr txBox="1"/>
           <p:nvPr/>
         </p:nvSpPr>
@@ -21061,7 +20705,7 @@
                 <a:ea typeface="Hiragino Sans GB"/>
                 <a:cs typeface="Hiragino Sans GB"/>
               </a:rPr>
-              <a:t>加入熟糯米粉 25g、白砂糖 25g、茯苓粉 10g、百合粉 10g，揉到不黏手的光滑麵團。</a:t>
+              <a:t>加入熟糯米粉 25g、白砂糖 25g，揉到不黏手的光滑麵團。</a:t>
             </a:r>
           </a:p>
         </p:txBody>
